--- a/crates/hanji-pptx/corpus/audit/synth-modern-pitch.pptx
+++ b/crates/hanji-pptx/corpus/audit/synth-modern-pitch.pptx
@@ -235,11 +235,11 @@
             </c:numRef>
           </c:val>
         </c:ser>
-        <c:axId val="-2068027336"/>
-        <c:axId val="-2113994440"/>
+        <c:axId val="2068027336"/>
+        <c:axId val="2113994440"/>
       </c:barChart>
       <c:catAx>
-        <c:axId val="-2068027336"/>
+        <c:axId val="2068027336"/>
         <c:scaling>
           <c:orientation val="minMax"/>
         </c:scaling>
@@ -248,7 +248,7 @@
         <c:majorTickMark val="out"/>
         <c:minorTickMark val="none"/>
         <c:tickLblPos val="nextTo"/>
-        <c:crossAx val="-2113994440"/>
+        <c:crossAx val="2113994440"/>
         <c:crosses val="autoZero"/>
         <c:auto val="1"/>
         <c:lblAlgn val="ctr"/>
@@ -256,7 +256,7 @@
         <c:noMultiLvlLbl val="0"/>
       </c:catAx>
       <c:valAx>
-        <c:axId val="-2113994440"/>
+        <c:axId val="2113994440"/>
         <c:scaling/>
         <c:delete val="0"/>
         <c:axPos val="l"/>
@@ -264,7 +264,7 @@
         <c:majorTickMark val="out"/>
         <c:minorTickMark val="none"/>
         <c:tickLblPos val="nextTo"/>
-        <c:crossAx val="-2068027336"/>
+        <c:crossAx val="2068027336"/>
         <c:crosses val="autoZero"/>
       </c:valAx>
     </c:plotArea>
@@ -4710,35 +4710,6 @@
   <p:clrMapOvr>
     <a:masterClrMapping/>
   </p:clrMapOvr>
-  <p:timing>
-    <p:tnLst>
-      <p:par>
-        <p:cTn id="1" dur="indefinite" restart="never" nodeType="tmRoot">
-          <p:childTnLst>
-            <p:seq concurrent="1" nextAc="seek">
-              <p:cTn id="2" dur="indefinite" nodeType="mainSeq">
-                <p:childTnLst/>
-              </p:cTn>
-              <p:prevCondLst>
-                <p:cond evt="onPrev" delay="0">
-                  <p:tgtEl>
-                    <p:sldTgt/>
-                  </p:tgtEl>
-                </p:cond>
-              </p:prevCondLst>
-              <p:nextCondLst>
-                <p:cond evt="onNext" delay="0">
-                  <p:tgtEl>
-                    <p:sldTgt/>
-                  </p:tgtEl>
-                </p:cond>
-              </p:nextCondLst>
-            </p:seq>
-          </p:childTnLst>
-        </p:cTn>
-      </p:par>
-    </p:tnLst>
-  </p:timing>
 </p:sld>
 </file>
 
